--- a/Submission/Defense/2025080297-Rafi Adifa Maulana-Comprehensive Scholarship.pptx
+++ b/Submission/Defense/2025080297-Rafi Adifa Maulana-Comprehensive Scholarship.pptx
@@ -4,6 +4,9 @@
   <p:sldMasterIdLst>
     <p:sldMasterId id="2147483648" r:id="rId1"/>
   </p:sldMasterIdLst>
+  <p:notesMasterIdLst>
+    <p:notesMasterId r:id="rId9"/>
+  </p:notesMasterIdLst>
   <p:sldIdLst>
     <p:sldId id="256" r:id="rId2"/>
     <p:sldId id="257" r:id="rId3"/>
@@ -13,9 +16,6 @@
     <p:sldId id="261" r:id="rId7"/>
     <p:sldId id="262" r:id="rId8"/>
   </p:sldIdLst>
-  <p:notesMasterIdLst>
-    <p:notesMasterId r:id="rId9"/>
-  </p:notesMasterIdLst>
   <p:sldSz cx="12192000" cy="6858000"/>
   <p:notesSz cx="6858000" cy="12192000"/>
   <p:defaultTextStyle>
@@ -113,13 +113,13 @@
   <p:extLst>
     <p:ext uri="{521415D9-36F7-43E2-AB2F-B90AF26B5E84}">
       <p14:sectionLst xmlns:p14="http://schemas.microsoft.com/office/powerpoint/2010/main">
-        <p14:section name="Opening" id="{2cb5ed37-439f-e821-a872-ca4d7e1a80fc}">
+        <p14:section name="Opening" id="{2CB5ED37-439F-E821-A872-CA4D7E1A80FC}">
           <p14:sldIdLst>
             <p14:sldId id="256"/>
             <p14:sldId id="257"/>
           </p14:sldIdLst>
         </p14:section>
-        <p14:section name="Evidence" id="{0369290d-3c04-a480-3efd-8673e984e5ce}">
+        <p14:section name="Evidence" id="{0369290D-3C04-A480-3EFD-8673E984E5CE}">
           <p14:sldIdLst>
             <p14:sldId id="258"/>
             <p14:sldId id="259"/>
@@ -127,7 +127,7 @@
             <p14:sldId id="261"/>
           </p14:sldIdLst>
         </p14:section>
-        <p14:section name="Close" id="{f78a1f63-9a51-ba4e-ea47-cd9e840b9231}">
+        <p14:section name="Close" id="{F78A1F63-9A51-BA4E-EA47-CD9E840B9231}">
           <p14:sldIdLst>
             <p14:sldId id="262"/>
           </p14:sldIdLst>
@@ -163,234 +163,10 @@
           <a:chExt cx="0" cy="0"/>
         </a:xfrm>
       </p:grpSpPr>
-      <p:sp>
-        <p:nvSpPr>
-          <p:cNvPr id="2" name="Header Placeholder 1"/>
-          <p:cNvSpPr>
-            <a:spLocks noGrp="1"/>
-          </p:cNvSpPr>
-          <p:nvPr>
-            <p:ph type="hdr" sz="quarter"/>
-          </p:nvPr>
-        </p:nvSpPr>
-        <p:spPr>
-          <a:xfrm>
-            <a:off x="0" y="0"/>
-            <a:ext cx="2971800" cy="458788"/>
-          </a:xfrm>
-          <a:prstGeom prst="rect">
-            <a:avLst/>
-          </a:prstGeom>
-        </p:spPr>
-        <p:txBody>
-          <a:bodyPr vert="horz" lIns="91440" tIns="45720" rIns="91440" bIns="45720" rtlCol="0"/>
-          <a:lstStyle>
-            <a:lvl1pPr algn="l">
-              <a:defRPr sz="1200"/>
-            </a:lvl1pPr>
-          </a:lstStyle>
-          <a:p>
-            <a:endParaRPr lang="en-US"/>
-          </a:p>
-        </p:txBody>
-      </p:sp>
-      <p:sp>
-        <p:nvSpPr>
-          <p:cNvPr id="3" name="Date Placeholder 2"/>
-          <p:cNvSpPr>
-            <a:spLocks noGrp="1"/>
-          </p:cNvSpPr>
-          <p:nvPr>
-            <p:ph type="dt" idx="1"/>
-          </p:nvPr>
-        </p:nvSpPr>
-        <p:spPr>
-          <a:xfrm>
-            <a:off x="3884613" y="0"/>
-            <a:ext cx="2971800" cy="458788"/>
-          </a:xfrm>
-          <a:prstGeom prst="rect">
-            <a:avLst/>
-          </a:prstGeom>
-        </p:spPr>
-        <p:txBody>
-          <a:bodyPr vert="horz" lIns="91440" tIns="45720" rIns="91440" bIns="45720" rtlCol="0"/>
-          <a:lstStyle>
-            <a:lvl1pPr algn="r">
-              <a:defRPr sz="1200"/>
-            </a:lvl1pPr>
-          </a:lstStyle>
-          <a:p>
-            <a:fld id="{5282F153-3F37-0F45-9E97-73ACFA13230C}" type="datetimeFigureOut">
-              <a:rPr lang="en-US"/>
-              <a:t>7/23/19</a:t>
-            </a:fld>
-            <a:endParaRPr lang="en-US"/>
-          </a:p>
-        </p:txBody>
-      </p:sp>
-      <p:sp>
-        <p:nvSpPr>
-          <p:cNvPr id="4" name="Slide Image Placeholder 3"/>
-          <p:cNvSpPr>
-            <a:spLocks noGrp="1" noRot="1" noChangeAspect="1"/>
-          </p:cNvSpPr>
-          <p:nvPr>
-            <p:ph type="sldImg" idx="2"/>
-          </p:nvPr>
-        </p:nvSpPr>
-        <p:spPr>
-          <a:xfrm>
-            <a:off x="685800" y="1143000"/>
-            <a:ext cx="5486400" cy="3086100"/>
-          </a:xfrm>
-          <a:prstGeom prst="rect">
-            <a:avLst/>
-          </a:prstGeom>
-          <a:noFill/>
-          <a:ln w="12700">
-            <a:solidFill>
-              <a:prstClr val="black"/>
-            </a:solidFill>
-          </a:ln>
-        </p:spPr>
-        <p:txBody>
-          <a:bodyPr vert="horz" lIns="91440" tIns="45720" rIns="91440" bIns="45720" rtlCol="0" anchor="ctr"/>
-          <a:lstStyle/>
-          <a:p>
-            <a:endParaRPr lang="en-US"/>
-          </a:p>
-        </p:txBody>
-      </p:sp>
-      <p:sp>
-        <p:nvSpPr>
-          <p:cNvPr id="5" name="Notes Placeholder 4"/>
-          <p:cNvSpPr>
-            <a:spLocks noGrp="1"/>
-          </p:cNvSpPr>
-          <p:nvPr>
-            <p:ph type="body" sz="quarter" idx="3"/>
-          </p:nvPr>
-        </p:nvSpPr>
-        <p:spPr>
-          <a:xfrm>
-            <a:off x="685800" y="4400550"/>
-            <a:ext cx="5486400" cy="3600450"/>
-          </a:xfrm>
-          <a:prstGeom prst="rect">
-            <a:avLst/>
-          </a:prstGeom>
-        </p:spPr>
-        <p:txBody>
-          <a:bodyPr vert="horz" lIns="91440" tIns="45720" rIns="91440" bIns="45720" rtlCol="0"/>
-          <a:lstStyle/>
-          <a:p>
-            <a:pPr lvl="0"/>
-            <a:r>
-              <a:rPr lang="en-US"/>
-              <a:t>Click to edit Master text styles</a:t>
-            </a:r>
-          </a:p>
-          <a:p>
-            <a:pPr lvl="1"/>
-            <a:r>
-              <a:rPr lang="en-US"/>
-              <a:t>Second level</a:t>
-            </a:r>
-          </a:p>
-          <a:p>
-            <a:pPr lvl="2"/>
-            <a:r>
-              <a:rPr lang="en-US"/>
-              <a:t>Third level</a:t>
-            </a:r>
-          </a:p>
-          <a:p>
-            <a:pPr lvl="3"/>
-            <a:r>
-              <a:rPr lang="en-US"/>
-              <a:t>Fourth level</a:t>
-            </a:r>
-          </a:p>
-          <a:p>
-            <a:pPr lvl="4"/>
-            <a:r>
-              <a:rPr lang="en-US"/>
-              <a:t>Fifth level</a:t>
-            </a:r>
-          </a:p>
-        </p:txBody>
-      </p:sp>
-      <p:sp>
-        <p:nvSpPr>
-          <p:cNvPr id="6" name="Footer Placeholder 5"/>
-          <p:cNvSpPr>
-            <a:spLocks noGrp="1"/>
-          </p:cNvSpPr>
-          <p:nvPr>
-            <p:ph type="ftr" sz="quarter" idx="4"/>
-          </p:nvPr>
-        </p:nvSpPr>
-        <p:spPr>
-          <a:xfrm>
-            <a:off x="0" y="8685213"/>
-            <a:ext cx="2971800" cy="458787"/>
-          </a:xfrm>
-          <a:prstGeom prst="rect">
-            <a:avLst/>
-          </a:prstGeom>
-        </p:spPr>
-        <p:txBody>
-          <a:bodyPr vert="horz" lIns="91440" tIns="45720" rIns="91440" bIns="45720" rtlCol="0" anchor="b"/>
-          <a:lstStyle>
-            <a:lvl1pPr algn="l">
-              <a:defRPr sz="1200"/>
-            </a:lvl1pPr>
-          </a:lstStyle>
-          <a:p>
-            <a:endParaRPr lang="en-US"/>
-          </a:p>
-        </p:txBody>
-      </p:sp>
-      <p:sp>
-        <p:nvSpPr>
-          <p:cNvPr id="7" name="Slide Number Placeholder 6"/>
-          <p:cNvSpPr>
-            <a:spLocks noGrp="1"/>
-          </p:cNvSpPr>
-          <p:nvPr>
-            <p:ph type="sldNum" sz="quarter" idx="5"/>
-          </p:nvPr>
-        </p:nvSpPr>
-        <p:spPr>
-          <a:xfrm>
-            <a:off x="3884613" y="8685213"/>
-            <a:ext cx="2971800" cy="458787"/>
-          </a:xfrm>
-          <a:prstGeom prst="rect">
-            <a:avLst/>
-          </a:prstGeom>
-        </p:spPr>
-        <p:txBody>
-          <a:bodyPr vert="horz" lIns="91440" tIns="45720" rIns="91440" bIns="45720" rtlCol="0" anchor="b"/>
-          <a:lstStyle>
-            <a:lvl1pPr algn="r">
-              <a:defRPr sz="1200"/>
-            </a:lvl1pPr>
-          </a:lstStyle>
-          <a:p>
-            <a:fld id="{CE5E9CC1-C706-0F49-92D6-E571CC5EEA8F}" type="slidenum">
-              <a:rPr lang="en-US"/>
-              <a:t>‹#›</a:t>
-            </a:fld>
-            <a:endParaRPr lang="en-US"/>
-          </a:p>
-        </p:txBody>
-      </p:sp>
     </p:spTree>
     <p:extLst>
       <p:ext uri="{BB962C8B-B14F-4D97-AF65-F5344CB8AC3E}">
-        <p14:creationId xmlns:p14="http://schemas.microsoft.com/office/powerpoint/2010/main" val="1024086991"/>
+        <p14:creationId xmlns:p14="http://schemas.microsoft.com/office/powerpoint/2010/main" val="893788082"/>
       </p:ext>
     </p:extLst>
   </p:cSld>
@@ -538,7 +314,6 @@
               <a:rPr lang="en-US" dirty="0"/>
               <a:t>[~13 s] Good afternoon, teachers. I'm Rafi Adifa Maulana, from Zijing Class 51, studying Urban Planning. One idea connects everything I did this year: designing bridges, between cultures, between disciplines, and between people.</a:t>
             </a:r>
-            <a:endParaRPr lang="en-US" dirty="0"/>
           </a:p>
         </p:txBody>
       </p:sp>
@@ -626,7 +401,6 @@
               <a:rPr lang="en-US" dirty="0"/>
               <a:t>[~25 s] I'm Sundanese, from West Java, and my family comes from Kampung Naga, a traditional village that still lives the way its ancestors built it. That's where I learned that buildings carry culture, and it's why I came to Tsinghua to study planning. At Zijing I keep bringing cultures into the same room, like wearing Sundanese dress in our multicultural fashion show.</a:t>
             </a:r>
-            <a:endParaRPr lang="en-US" dirty="0"/>
           </a:p>
         </p:txBody>
       </p:sp>
@@ -714,7 +488,6 @@
               <a:rPr lang="en-US" dirty="0"/>
               <a:t>[~10 s] First, the base. My GPA is 3.735 out of 4.0. I'm 19th in Zijing College and 5th in Class 51, with no failed courses.</a:t>
             </a:r>
-            <a:endParaRPr lang="en-US" dirty="0"/>
           </a:p>
         </p:txBody>
       </p:sp>
@@ -802,7 +575,6 @@
               <a:rPr lang="en-US" dirty="0"/>
               <a:t>[~29 s] Second, building. With my SRT team in Tenganan, Bali, we 3D-scanned the village's historic buildings to document and help preserve them. I handled much of the communication and logistics on site, and I helped organize the international conference where we shared the work. In studio I keep the same habit, design it and then build it, from an earthquake-resilient balsa structure to a live seating-map prototype for the Qingfen canteen.</a:t>
             </a:r>
-            <a:endParaRPr lang="en-US" dirty="0"/>
           </a:p>
         </p:txBody>
       </p:sp>
@@ -890,7 +662,6 @@
               <a:rPr lang="en-US" dirty="0"/>
               <a:t>[~30 s] Third, serving. Since 2025 I've been on the Student Association's Science and Technology Administration and Design team. I'm the main designer of Zijing's Uzbekistan deep dive, the WeChat series and now the magazine, and my Steamy design won first place as Zijing's mascot. I joined three practice programs: Guangzhou, where our team earned an A, Uzbekistan, and Tenganan. And for our fourteen Garuda scholars, I'm the person newer students come to first.</a:t>
             </a:r>
-            <a:endParaRPr lang="en-US" dirty="0"/>
           </a:p>
         </p:txBody>
       </p:sp>
@@ -978,7 +749,6 @@
               <a:rPr lang="en-US" dirty="0"/>
               <a:t>[~19 s] Fourth, performing. I wrote the lyrics and sang lead on "One", Zijing's first theme song, at the Student Festival in May. I danced in two festival performances, coordinated our K-pop set with C:RUSH, and our Ma Cup cheer team placed fifth with the Sportsmanship Award.</a:t>
             </a:r>
-            <a:endParaRPr lang="en-US" dirty="0"/>
           </a:p>
         </p:txBody>
       </p:sp>
@@ -1077,7 +847,6 @@
 Q: What will you improve next year?
 Be honest and specific: one area to grow (e.g. Chinese level, research depth) and a concrete step.</a:t>
             </a:r>
-            <a:endParaRPr lang="en-US" dirty="0"/>
           </a:p>
         </p:txBody>
       </p:sp>
@@ -1150,6 +919,11 @@
 <file path=ppt/slideMasters/slideMaster1.xml><?xml version="1.0" encoding="utf-8"?>
 <p:sldMaster xmlns:a="http://schemas.openxmlformats.org/drawingml/2006/main" xmlns:r="http://schemas.openxmlformats.org/officeDocument/2006/relationships" xmlns:p="http://schemas.openxmlformats.org/presentationml/2006/main">
   <p:cSld>
+    <p:bg>
+      <p:bgRef idx="1001">
+        <a:schemeClr val="bg1"/>
+      </p:bgRef>
+    </p:bg>
     <p:spTree>
       <p:nvGrpSpPr>
         <p:cNvPr id="1" name=""/>
@@ -1432,6 +1206,7 @@
         <a:solidFill>
           <a:srgbClr val="1A1410"/>
         </a:solidFill>
+        <a:effectLst/>
       </p:bgPr>
     </p:bg>
     <p:spTree>
@@ -1450,14 +1225,14 @@
       </p:grpSpPr>
       <p:pic>
         <p:nvPicPr>
-          <p:cNvPr id="2" name="Kawung batik border" descr="Decorative kawung batik border">    </p:cNvPr>
+          <p:cNvPr id="2" name="Kawung batik border" descr="Decorative kawung batik border"/>
           <p:cNvPicPr>
             <a:picLocks noChangeAspect="1"/>
           </p:cNvPicPr>
           <p:nvPr/>
         </p:nvPicPr>
         <p:blipFill>
-          <a:blip r:embed="rId1"/>
+          <a:blip r:embed="rId3"/>
           <a:stretch>
             <a:fillRect/>
           </a:stretch>
@@ -1474,14 +1249,14 @@
       </p:pic>
       <p:pic>
         <p:nvPicPr>
-          <p:cNvPr id="3" name="Cover photo" descr="Rafi speaking at a meeting in Tashkent, with Uzbek and Chinese flags on the table">    </p:cNvPr>
+          <p:cNvPr id="3" name="Cover photo" descr="Rafi speaking at a meeting in Tashkent, with Uzbek and Chinese flags on the table"/>
           <p:cNvPicPr>
             <a:picLocks noChangeAspect="1"/>
           </p:cNvPicPr>
           <p:nvPr/>
         </p:nvPicPr>
         <p:blipFill>
-          <a:blip r:embed="rId2"/>
+          <a:blip r:embed="rId4"/>
           <a:stretch>
             <a:fillRect/>
           </a:stretch>
@@ -1517,11 +1292,11 @@
           <a:bodyPr wrap="square" lIns="0" tIns="0" rIns="0" bIns="0" rtlCol="0" anchor="t"/>
           <a:lstStyle/>
           <a:p>
-            <a:pPr indent="0" marL="0">
+            <a:pPr marL="0" indent="0">
               <a:buNone/>
             </a:pPr>
             <a:r>
-              <a:rPr lang="en-US" sz="1200" b="1" spc="400" kern="0" dirty="0">
+              <a:rPr lang="en-US" sz="1200" b="1" kern="0" spc="400" dirty="0">
                 <a:solidFill>
                   <a:schemeClr val="accent1"/>
                 </a:solidFill>
@@ -1553,7 +1328,7 @@
           <a:bodyPr wrap="square" lIns="0" tIns="0" rIns="0" bIns="0" rtlCol="0" anchor="t"/>
           <a:lstStyle/>
           <a:p>
-            <a:pPr indent="0" marL="0">
+            <a:pPr marL="0" indent="0">
               <a:lnSpc>
                 <a:spcPct val="95000"/>
               </a:lnSpc>
@@ -1573,7 +1348,7 @@
             <a:endParaRPr lang="en-US" sz="6000" dirty="0"/>
           </a:p>
           <a:p>
-            <a:pPr indent="0" marL="0">
+            <a:pPr marL="0" indent="0">
               <a:lnSpc>
                 <a:spcPct val="95000"/>
               </a:lnSpc>
@@ -1615,7 +1390,7 @@
           <a:bodyPr wrap="square" lIns="0" tIns="0" rIns="0" bIns="0" rtlCol="0" anchor="t"/>
           <a:lstStyle/>
           <a:p>
-            <a:pPr indent="0" marL="0">
+            <a:pPr marL="0" indent="0">
               <a:buNone/>
             </a:pPr>
             <a:r>
@@ -1651,7 +1426,7 @@
           <a:bodyPr wrap="square" lIns="0" tIns="0" rIns="0" bIns="0" rtlCol="0" anchor="t"/>
           <a:lstStyle/>
           <a:p>
-            <a:pPr indent="0" marL="0">
+            <a:pPr marL="0" indent="0">
               <a:buNone/>
             </a:pPr>
             <a:r>
@@ -1690,7 +1465,7 @@
           <a:bodyPr wrap="square" lIns="0" tIns="0" rIns="0" bIns="0" rtlCol="0" anchor="t"/>
           <a:lstStyle/>
           <a:p>
-            <a:pPr indent="0" marL="0">
+            <a:pPr marL="0" indent="0">
               <a:buNone/>
             </a:pPr>
             <a:r>
@@ -1721,6 +1496,7 @@
         <a:solidFill>
           <a:srgbClr val="1A1410"/>
         </a:solidFill>
+        <a:effectLst/>
       </p:bgPr>
     </p:bg>
     <p:spTree>
@@ -1739,14 +1515,14 @@
       </p:grpSpPr>
       <p:pic>
         <p:nvPicPr>
-          <p:cNvPr id="2" name="Roots photo" descr="Multicultural fashion show at Zijing, with students in traditional Sundanese and other cultural dress">    </p:cNvPr>
+          <p:cNvPr id="2" name="Roots photo" descr="Multicultural fashion show at Zijing, with students in traditional Sundanese and other cultural dress"/>
           <p:cNvPicPr>
             <a:picLocks noChangeAspect="1"/>
           </p:cNvPicPr>
           <p:nvPr/>
         </p:nvPicPr>
         <p:blipFill>
-          <a:blip r:embed="rId1"/>
+          <a:blip r:embed="rId3"/>
           <a:stretch>
             <a:fillRect/>
           </a:stretch>
@@ -1763,14 +1539,14 @@
       </p:pic>
       <p:pic>
         <p:nvPicPr>
-          <p:cNvPr id="3" name="Scrim" descr="Decorative shading over photo">    </p:cNvPr>
+          <p:cNvPr id="3" name="Scrim" descr="Decorative shading over photo"/>
           <p:cNvPicPr>
             <a:picLocks noChangeAspect="1"/>
           </p:cNvPicPr>
           <p:nvPr/>
         </p:nvPicPr>
         <p:blipFill>
-          <a:blip r:embed="rId2"/>
+          <a:blip r:embed="rId4"/>
           <a:stretch>
             <a:fillRect/>
           </a:stretch>
@@ -1806,11 +1582,11 @@
           <a:bodyPr wrap="square" lIns="0" tIns="0" rIns="0" bIns="0" rtlCol="0" anchor="t"/>
           <a:lstStyle/>
           <a:p>
-            <a:pPr indent="0" marL="0">
+            <a:pPr marL="0" indent="0">
               <a:buNone/>
             </a:pPr>
             <a:r>
-              <a:rPr lang="en-US" sz="1200" b="1" spc="400" kern="0" dirty="0">
+              <a:rPr lang="en-US" sz="1200" b="1" kern="0" spc="400" dirty="0">
                 <a:solidFill>
                   <a:schemeClr val="accent1"/>
                 </a:solidFill>
@@ -1842,7 +1618,7 @@
           <a:bodyPr wrap="square" lIns="0" tIns="0" rIns="0" bIns="0" rtlCol="0" anchor="t"/>
           <a:lstStyle/>
           <a:p>
-            <a:pPr indent="0" marL="0">
+            <a:pPr marL="0" indent="0">
               <a:lnSpc>
                 <a:spcPct val="95000"/>
               </a:lnSpc>
@@ -1884,7 +1660,7 @@
           <a:bodyPr wrap="square" lIns="0" tIns="0" rIns="0" bIns="0" rtlCol="0" anchor="t"/>
           <a:lstStyle/>
           <a:p>
-            <a:pPr indent="0" marL="0">
+            <a:pPr marL="0" indent="0">
               <a:buNone/>
             </a:pPr>
             <a:r>
@@ -1926,7 +1702,7 @@
           <a:bodyPr wrap="square" lIns="114300" tIns="114300" rIns="114300" bIns="114300" rtlCol="0" anchor="ctr"/>
           <a:lstStyle/>
           <a:p>
-            <a:pPr algn="l" indent="0" marL="0">
+            <a:pPr marL="0" indent="0" algn="l">
               <a:buNone/>
             </a:pPr>
             <a:r>
@@ -1957,6 +1733,7 @@
         <a:solidFill>
           <a:srgbClr val="8B4A1F"/>
         </a:solidFill>
+        <a:effectLst/>
       </p:bgPr>
     </p:bg>
     <p:spTree>
@@ -1975,14 +1752,14 @@
       </p:grpSpPr>
       <p:pic>
         <p:nvPicPr>
-          <p:cNvPr id="2" name="Kawung batik border" descr="Decorative kawung batik border">    </p:cNvPr>
+          <p:cNvPr id="2" name="Kawung batik border" descr="Decorative kawung batik border"/>
           <p:cNvPicPr>
             <a:picLocks noChangeAspect="1"/>
           </p:cNvPicPr>
           <p:nvPr/>
         </p:nvPicPr>
         <p:blipFill>
-          <a:blip r:embed="rId1"/>
+          <a:blip r:embed="rId3"/>
           <a:stretch>
             <a:fillRect/>
           </a:stretch>
@@ -2018,11 +1795,11 @@
           <a:bodyPr wrap="square" lIns="0" tIns="0" rIns="0" bIns="0" rtlCol="0" anchor="t"/>
           <a:lstStyle/>
           <a:p>
-            <a:pPr indent="0" marL="0">
+            <a:pPr marL="0" indent="0">
               <a:buNone/>
             </a:pPr>
             <a:r>
-              <a:rPr lang="en-US" sz="1200" b="1" spc="400" kern="0" dirty="0">
+              <a:rPr lang="en-US" sz="1200" b="1" kern="0" spc="400" dirty="0">
                 <a:solidFill>
                   <a:schemeClr val="bg2"/>
                 </a:solidFill>
@@ -2054,7 +1831,7 @@
           <a:bodyPr wrap="square" lIns="0" tIns="0" rIns="0" bIns="0" rtlCol="0" anchor="t"/>
           <a:lstStyle/>
           <a:p>
-            <a:pPr indent="0" marL="0">
+            <a:pPr marL="0" indent="0">
               <a:buNone/>
             </a:pPr>
             <a:r>
@@ -2115,7 +1892,7 @@
           <a:bodyPr wrap="square" lIns="0" tIns="0" rIns="0" bIns="0" rtlCol="0" anchor="t"/>
           <a:lstStyle/>
           <a:p>
-            <a:pPr indent="0" marL="0">
+            <a:pPr marL="0" indent="0">
               <a:buNone/>
             </a:pPr>
             <a:r>
@@ -2154,7 +1931,7 @@
           <a:bodyPr wrap="square" lIns="0" tIns="0" rIns="0" bIns="0" rtlCol="0" anchor="t"/>
           <a:lstStyle/>
           <a:p>
-            <a:pPr indent="0" marL="0">
+            <a:pPr marL="0" indent="0">
               <a:buNone/>
             </a:pPr>
             <a:r>
@@ -2212,7 +1989,7 @@
           <a:bodyPr wrap="square" lIns="0" tIns="0" rIns="0" bIns="0" rtlCol="0" anchor="t"/>
           <a:lstStyle/>
           <a:p>
-            <a:pPr indent="0" marL="0">
+            <a:pPr marL="0" indent="0">
               <a:buNone/>
             </a:pPr>
             <a:r>
@@ -2251,7 +2028,7 @@
           <a:bodyPr wrap="square" lIns="0" tIns="0" rIns="0" bIns="0" rtlCol="0" anchor="t"/>
           <a:lstStyle/>
           <a:p>
-            <a:pPr indent="0" marL="0">
+            <a:pPr marL="0" indent="0">
               <a:buNone/>
             </a:pPr>
             <a:r>
@@ -2309,7 +2086,7 @@
           <a:bodyPr wrap="square" lIns="0" tIns="0" rIns="0" bIns="0" rtlCol="0" anchor="t"/>
           <a:lstStyle/>
           <a:p>
-            <a:pPr indent="0" marL="0">
+            <a:pPr marL="0" indent="0">
               <a:buNone/>
             </a:pPr>
             <a:r>
@@ -2348,7 +2125,7 @@
           <a:bodyPr wrap="square" lIns="0" tIns="0" rIns="0" bIns="0" rtlCol="0" anchor="t"/>
           <a:lstStyle/>
           <a:p>
-            <a:pPr indent="0" marL="0">
+            <a:pPr marL="0" indent="0">
               <a:buNone/>
             </a:pPr>
             <a:r>
@@ -2406,7 +2183,7 @@
           <a:bodyPr wrap="square" lIns="0" tIns="0" rIns="0" bIns="0" rtlCol="0" anchor="t"/>
           <a:lstStyle/>
           <a:p>
-            <a:pPr indent="0" marL="0">
+            <a:pPr marL="0" indent="0">
               <a:buNone/>
             </a:pPr>
             <a:r>
@@ -2445,7 +2222,7 @@
           <a:bodyPr wrap="square" lIns="0" tIns="0" rIns="0" bIns="0" rtlCol="0" anchor="t"/>
           <a:lstStyle/>
           <a:p>
-            <a:pPr indent="0" marL="0">
+            <a:pPr marL="0" indent="0">
               <a:buNone/>
             </a:pPr>
             <a:r>
@@ -2476,6 +2253,7 @@
         <a:solidFill>
           <a:srgbClr val="1A1410"/>
         </a:solidFill>
+        <a:effectLst/>
       </p:bgPr>
     </p:bg>
     <p:spTree>
@@ -2494,208 +2272,7 @@
       </p:grpSpPr>
       <p:pic>
         <p:nvPicPr>
-          <p:cNvPr id="2" name="Scanner photo" descr="The 3D scanner set up in front of a traditional building in Tenganan village, Bali">    </p:cNvPr>
-          <p:cNvPicPr>
-            <a:picLocks noChangeAspect="1"/>
-          </p:cNvPicPr>
-          <p:nvPr/>
-        </p:nvPicPr>
-        <p:blipFill>
-          <a:blip r:embed="rId1"/>
-          <a:stretch>
-            <a:fillRect/>
-          </a:stretch>
-        </p:blipFill>
-        <p:spPr>
-          <a:xfrm>
-            <a:off x="0" y="0"/>
-            <a:ext cx="6350000" cy="6858000"/>
-          </a:xfrm>
-          <a:prstGeom prst="rect">
-            <a:avLst/>
-          </a:prstGeom>
-        </p:spPr>
-      </p:pic>
-      <p:sp>
-        <p:nvSpPr>
-          <p:cNvPr id="3" name="Photo caption"/>
-          <p:cNvSpPr/>
-          <p:nvPr/>
-        </p:nvSpPr>
-        <p:spPr>
-          <a:xfrm>
-            <a:off x="304800" y="6096000"/>
-            <a:ext cx="3048000" cy="355600"/>
-          </a:xfrm>
-          <a:prstGeom prst="roundRect">
-            <a:avLst>
-              <a:gd name="adj" fmla="val 41143"/>
-            </a:avLst>
-          </a:prstGeom>
-          <a:solidFill>
-            <a:srgbClr val="1A1410">
-              <a:alpha val="92000"/>
-            </a:srgbClr>
-          </a:solidFill>
-          <a:ln/>
-        </p:spPr>
-        <p:txBody>
-          <a:bodyPr wrap="square" lIns="114300" tIns="114300" rIns="114300" bIns="114300" rtlCol="0" anchor="ctr"/>
-          <a:lstStyle/>
-          <a:p>
-            <a:pPr algn="l" indent="0" marL="0">
-              <a:buNone/>
-            </a:pPr>
-            <a:r>
-              <a:rPr lang="en-US" sz="1200" dirty="0">
-                <a:solidFill>
-                  <a:schemeClr val="bg1"/>
-                </a:solidFill>
-              </a:rPr>
-              <a:t>SRT  ·  3D scanner in action, Tenganan, Bali</a:t>
-            </a:r>
-            <a:endParaRPr lang="en-US" sz="1200" dirty="0"/>
-          </a:p>
-        </p:txBody>
-      </p:sp>
-      <p:sp>
-        <p:nvSpPr>
-          <p:cNvPr id="4" name="Eyebrow"/>
-          <p:cNvSpPr txBox="1"/>
-          <p:nvPr/>
-        </p:nvSpPr>
-        <p:spPr>
-          <a:xfrm>
-            <a:off x="6908800" y="952500"/>
-            <a:ext cx="5715000" cy="228600"/>
-          </a:xfrm>
-          <a:prstGeom prst="rect">
-            <a:avLst/>
-          </a:prstGeom>
-          <a:noFill/>
-          <a:ln/>
-        </p:spPr>
-        <p:txBody>
-          <a:bodyPr wrap="square" lIns="0" tIns="0" rIns="0" bIns="0" rtlCol="0" anchor="t"/>
-          <a:lstStyle/>
-          <a:p>
-            <a:pPr indent="0" marL="0">
-              <a:buNone/>
-            </a:pPr>
-            <a:r>
-              <a:rPr lang="en-US" sz="1200" b="1" spc="400" kern="0" dirty="0">
-                <a:solidFill>
-                  <a:schemeClr val="accent1"/>
-                </a:solidFill>
-              </a:rPr>
-              <a:t>03  ·  BUILD</a:t>
-            </a:r>
-            <a:endParaRPr lang="en-US" sz="1200" dirty="0"/>
-          </a:p>
-        </p:txBody>
-      </p:sp>
-      <p:sp>
-        <p:nvSpPr>
-          <p:cNvPr id="5" name="Title"/>
-          <p:cNvSpPr txBox="1"/>
-          <p:nvPr/>
-        </p:nvSpPr>
-        <p:spPr>
-          <a:xfrm>
-            <a:off x="6908800" y="1244600"/>
-            <a:ext cx="4470400" cy="1079500"/>
-          </a:xfrm>
-          <a:prstGeom prst="rect">
-            <a:avLst/>
-          </a:prstGeom>
-          <a:noFill/>
-          <a:ln/>
-        </p:spPr>
-        <p:txBody>
-          <a:bodyPr wrap="square" lIns="0" tIns="0" rIns="0" bIns="0" rtlCol="0" anchor="t"/>
-          <a:lstStyle/>
-          <a:p>
-            <a:pPr indent="0" marL="0">
-              <a:buNone/>
-            </a:pPr>
-            <a:r>
-              <a:rPr lang="en-US" sz="3200" b="1" dirty="0">
-                <a:solidFill>
-                  <a:schemeClr val="bg1"/>
-                </a:solidFill>
-                <a:latin typeface="+mj-lt" pitchFamily="34" charset="0"/>
-                <a:ea typeface="+mj-lt" pitchFamily="34" charset="-122"/>
-                <a:cs typeface="+mj-lt" pitchFamily="34" charset="-120"/>
-              </a:rPr>
-              <a:t>Scanning heritage, then sharing it</a:t>
-            </a:r>
-            <a:endParaRPr lang="en-US" sz="3200" dirty="0"/>
-          </a:p>
-        </p:txBody>
-      </p:sp>
-      <p:sp>
-        <p:nvSpPr>
-          <p:cNvPr id="6" name="Body"/>
-          <p:cNvSpPr txBox="1"/>
-          <p:nvPr/>
-        </p:nvSpPr>
-        <p:spPr>
-          <a:xfrm>
-            <a:off x="6908800" y="2400300"/>
-            <a:ext cx="4470400" cy="571500"/>
-          </a:xfrm>
-          <a:prstGeom prst="rect">
-            <a:avLst/>
-          </a:prstGeom>
-          <a:noFill/>
-          <a:ln/>
-        </p:spPr>
-        <p:txBody>
-          <a:bodyPr wrap="square" lIns="0" tIns="0" rIns="0" bIns="0" rtlCol="0" anchor="t"/>
-          <a:lstStyle/>
-          <a:p>
-            <a:pPr indent="0" marL="0">
-              <a:buNone/>
-            </a:pPr>
-            <a:r>
-              <a:rPr lang="en-US" sz="1500" dirty="0">
-                <a:solidFill>
-                  <a:schemeClr val="accent4"/>
-                </a:solidFill>
-              </a:rPr>
-              <a:t>Our SRT team 3D-scanned Tenganan's historic buildings to document and help preserve them.</a:t>
-            </a:r>
-            <a:endParaRPr lang="en-US" sz="1500" dirty="0"/>
-          </a:p>
-        </p:txBody>
-      </p:sp>
-      <p:pic>
-        <p:nvPicPr>
-          <p:cNvPr id="7" name="Village photo" descr="The SRT team in Tenganan village with local residents">    </p:cNvPr>
-          <p:cNvPicPr>
-            <a:picLocks noChangeAspect="1"/>
-          </p:cNvPicPr>
-          <p:nvPr/>
-        </p:nvPicPr>
-        <p:blipFill>
-          <a:blip r:embed="rId2"/>
-          <a:stretch>
-            <a:fillRect/>
-          </a:stretch>
-        </p:blipFill>
-        <p:spPr>
-          <a:xfrm>
-            <a:off x="6908800" y="3098800"/>
-            <a:ext cx="2159000" cy="1460500"/>
-          </a:xfrm>
-          <a:prstGeom prst="rect">
-            <a:avLst/>
-          </a:prstGeom>
-        </p:spPr>
-      </p:pic>
-      <p:pic>
-        <p:nvPicPr>
-          <p:cNvPr id="8" name="Conference photo" descr="Rafi with speakers at the international conference">    </p:cNvPr>
+          <p:cNvPr id="2" name="Scanner photo" descr="The 3D scanner set up in front of a traditional building in Tenganan village, Bali"/>
           <p:cNvPicPr>
             <a:picLocks noChangeAspect="1"/>
           </p:cNvPicPr>
@@ -2709,6 +2286,207 @@
         </p:blipFill>
         <p:spPr>
           <a:xfrm>
+            <a:off x="0" y="0"/>
+            <a:ext cx="6350000" cy="6858000"/>
+          </a:xfrm>
+          <a:prstGeom prst="rect">
+            <a:avLst/>
+          </a:prstGeom>
+        </p:spPr>
+      </p:pic>
+      <p:sp>
+        <p:nvSpPr>
+          <p:cNvPr id="3" name="Photo caption"/>
+          <p:cNvSpPr/>
+          <p:nvPr/>
+        </p:nvSpPr>
+        <p:spPr>
+          <a:xfrm>
+            <a:off x="304800" y="6096000"/>
+            <a:ext cx="3048000" cy="355600"/>
+          </a:xfrm>
+          <a:prstGeom prst="roundRect">
+            <a:avLst>
+              <a:gd name="adj" fmla="val 41143"/>
+            </a:avLst>
+          </a:prstGeom>
+          <a:solidFill>
+            <a:srgbClr val="1A1410">
+              <a:alpha val="92000"/>
+            </a:srgbClr>
+          </a:solidFill>
+          <a:ln/>
+        </p:spPr>
+        <p:txBody>
+          <a:bodyPr wrap="square" lIns="114300" tIns="114300" rIns="114300" bIns="114300" rtlCol="0" anchor="ctr"/>
+          <a:lstStyle/>
+          <a:p>
+            <a:pPr marL="0" indent="0" algn="l">
+              <a:buNone/>
+            </a:pPr>
+            <a:r>
+              <a:rPr lang="en-US" sz="1200" dirty="0">
+                <a:solidFill>
+                  <a:schemeClr val="bg1"/>
+                </a:solidFill>
+              </a:rPr>
+              <a:t>SRT  ·  3D scanner in action, Tenganan, Bali</a:t>
+            </a:r>
+            <a:endParaRPr lang="en-US" sz="1200" dirty="0"/>
+          </a:p>
+        </p:txBody>
+      </p:sp>
+      <p:sp>
+        <p:nvSpPr>
+          <p:cNvPr id="4" name="Eyebrow"/>
+          <p:cNvSpPr txBox="1"/>
+          <p:nvPr/>
+        </p:nvSpPr>
+        <p:spPr>
+          <a:xfrm>
+            <a:off x="6908800" y="952500"/>
+            <a:ext cx="5715000" cy="228600"/>
+          </a:xfrm>
+          <a:prstGeom prst="rect">
+            <a:avLst/>
+          </a:prstGeom>
+          <a:noFill/>
+          <a:ln/>
+        </p:spPr>
+        <p:txBody>
+          <a:bodyPr wrap="square" lIns="0" tIns="0" rIns="0" bIns="0" rtlCol="0" anchor="t"/>
+          <a:lstStyle/>
+          <a:p>
+            <a:pPr marL="0" indent="0">
+              <a:buNone/>
+            </a:pPr>
+            <a:r>
+              <a:rPr lang="en-US" sz="1200" b="1" kern="0" spc="400" dirty="0">
+                <a:solidFill>
+                  <a:schemeClr val="accent1"/>
+                </a:solidFill>
+              </a:rPr>
+              <a:t>03  ·  BUILD</a:t>
+            </a:r>
+            <a:endParaRPr lang="en-US" sz="1200" dirty="0"/>
+          </a:p>
+        </p:txBody>
+      </p:sp>
+      <p:sp>
+        <p:nvSpPr>
+          <p:cNvPr id="5" name="Title"/>
+          <p:cNvSpPr txBox="1"/>
+          <p:nvPr/>
+        </p:nvSpPr>
+        <p:spPr>
+          <a:xfrm>
+            <a:off x="6908800" y="1244600"/>
+            <a:ext cx="4470400" cy="1079500"/>
+          </a:xfrm>
+          <a:prstGeom prst="rect">
+            <a:avLst/>
+          </a:prstGeom>
+          <a:noFill/>
+          <a:ln/>
+        </p:spPr>
+        <p:txBody>
+          <a:bodyPr wrap="square" lIns="0" tIns="0" rIns="0" bIns="0" rtlCol="0" anchor="t"/>
+          <a:lstStyle/>
+          <a:p>
+            <a:pPr marL="0" indent="0">
+              <a:buNone/>
+            </a:pPr>
+            <a:r>
+              <a:rPr lang="en-US" sz="3200" b="1" dirty="0">
+                <a:solidFill>
+                  <a:schemeClr val="bg1"/>
+                </a:solidFill>
+                <a:latin typeface="+mj-lt" pitchFamily="34" charset="0"/>
+                <a:ea typeface="+mj-lt" pitchFamily="34" charset="-122"/>
+                <a:cs typeface="+mj-lt" pitchFamily="34" charset="-120"/>
+              </a:rPr>
+              <a:t>Scanning heritage, then sharing it</a:t>
+            </a:r>
+            <a:endParaRPr lang="en-US" sz="3200" dirty="0"/>
+          </a:p>
+        </p:txBody>
+      </p:sp>
+      <p:sp>
+        <p:nvSpPr>
+          <p:cNvPr id="6" name="Body"/>
+          <p:cNvSpPr txBox="1"/>
+          <p:nvPr/>
+        </p:nvSpPr>
+        <p:spPr>
+          <a:xfrm>
+            <a:off x="6908800" y="2400300"/>
+            <a:ext cx="4470400" cy="571500"/>
+          </a:xfrm>
+          <a:prstGeom prst="rect">
+            <a:avLst/>
+          </a:prstGeom>
+          <a:noFill/>
+          <a:ln/>
+        </p:spPr>
+        <p:txBody>
+          <a:bodyPr wrap="square" lIns="0" tIns="0" rIns="0" bIns="0" rtlCol="0" anchor="t"/>
+          <a:lstStyle/>
+          <a:p>
+            <a:pPr marL="0" indent="0">
+              <a:buNone/>
+            </a:pPr>
+            <a:r>
+              <a:rPr lang="en-US" sz="1500" dirty="0">
+                <a:solidFill>
+                  <a:schemeClr val="accent4"/>
+                </a:solidFill>
+              </a:rPr>
+              <a:t>Our SRT team 3D-scanned Tenganan's historic buildings to document and help preserve them.</a:t>
+            </a:r>
+            <a:endParaRPr lang="en-US" sz="1500" dirty="0"/>
+          </a:p>
+        </p:txBody>
+      </p:sp>
+      <p:pic>
+        <p:nvPicPr>
+          <p:cNvPr id="7" name="Village photo" descr="The SRT team in Tenganan village with local residents"/>
+          <p:cNvPicPr>
+            <a:picLocks noChangeAspect="1"/>
+          </p:cNvPicPr>
+          <p:nvPr/>
+        </p:nvPicPr>
+        <p:blipFill>
+          <a:blip r:embed="rId4"/>
+          <a:stretch>
+            <a:fillRect/>
+          </a:stretch>
+        </p:blipFill>
+        <p:spPr>
+          <a:xfrm>
+            <a:off x="6908800" y="3098800"/>
+            <a:ext cx="2159000" cy="1460500"/>
+          </a:xfrm>
+          <a:prstGeom prst="rect">
+            <a:avLst/>
+          </a:prstGeom>
+        </p:spPr>
+      </p:pic>
+      <p:pic>
+        <p:nvPicPr>
+          <p:cNvPr id="8" name="Conference photo" descr="Rafi with speakers at the international conference"/>
+          <p:cNvPicPr>
+            <a:picLocks noChangeAspect="1"/>
+          </p:cNvPicPr>
+          <p:nvPr/>
+        </p:nvPicPr>
+        <p:blipFill>
+          <a:blip r:embed="rId5"/>
+          <a:stretch>
+            <a:fillRect/>
+          </a:stretch>
+        </p:blipFill>
+        <p:spPr>
+          <a:xfrm>
             <a:off x="9220200" y="3098800"/>
             <a:ext cx="2159000" cy="1460500"/>
           </a:xfrm>
@@ -2738,7 +2516,7 @@
           <a:bodyPr wrap="square" lIns="0" tIns="0" rIns="0" bIns="0" rtlCol="0" anchor="t"/>
           <a:lstStyle/>
           <a:p>
-            <a:pPr indent="0" marL="0">
+            <a:pPr marL="0" indent="0">
               <a:buNone/>
             </a:pPr>
             <a:r>
@@ -2774,7 +2552,7 @@
           <a:bodyPr wrap="square" lIns="0" tIns="0" rIns="0" bIns="0" rtlCol="0" anchor="t"/>
           <a:lstStyle/>
           <a:p>
-            <a:pPr indent="0" marL="0">
+            <a:pPr marL="0" indent="0">
               <a:buNone/>
             </a:pPr>
             <a:r>
@@ -2810,7 +2588,7 @@
           <a:bodyPr wrap="square" lIns="0" tIns="0" rIns="0" bIns="0" rtlCol="0" anchor="t"/>
           <a:lstStyle/>
           <a:p>
-            <a:pPr indent="0" marL="0">
+            <a:pPr marL="0" indent="0">
               <a:buNone/>
             </a:pPr>
             <a:r>
@@ -2841,6 +2619,7 @@
         <a:solidFill>
           <a:srgbClr val="F4ECDD"/>
         </a:solidFill>
+        <a:effectLst/>
       </p:bgPr>
     </p:bg>
     <p:spTree>
@@ -2878,11 +2657,11 @@
           <a:bodyPr wrap="square" lIns="0" tIns="0" rIns="0" bIns="0" rtlCol="0" anchor="t"/>
           <a:lstStyle/>
           <a:p>
-            <a:pPr indent="0" marL="0">
+            <a:pPr marL="0" indent="0">
               <a:buNone/>
             </a:pPr>
             <a:r>
-              <a:rPr lang="en-US" sz="1200" b="1" spc="400" kern="0" dirty="0">
+              <a:rPr lang="en-US" sz="1200" b="1" kern="0" spc="400" dirty="0">
                 <a:solidFill>
                   <a:schemeClr val="tx2"/>
                 </a:solidFill>
@@ -2914,7 +2693,7 @@
           <a:bodyPr wrap="square" lIns="0" tIns="0" rIns="0" bIns="0" rtlCol="0" anchor="t"/>
           <a:lstStyle/>
           <a:p>
-            <a:pPr indent="0" marL="0">
+            <a:pPr marL="0" indent="0">
               <a:buNone/>
             </a:pPr>
             <a:r>
@@ -2959,7 +2738,7 @@
           <a:bodyPr wrap="square" lIns="114300" tIns="114300" rIns="114300" bIns="114300" rtlCol="0" anchor="ctr"/>
           <a:lstStyle/>
           <a:p>
-            <a:pPr algn="l" indent="0" marL="0">
+            <a:pPr marL="0" indent="0" algn="l">
               <a:buNone/>
             </a:pPr>
             <a:r>
@@ -3001,7 +2780,7 @@
           <a:bodyPr wrap="square" lIns="114300" tIns="114300" rIns="114300" bIns="114300" rtlCol="0" anchor="ctr"/>
           <a:lstStyle/>
           <a:p>
-            <a:pPr algn="l" indent="0" marL="0">
+            <a:pPr marL="0" indent="0" algn="l">
               <a:buNone/>
             </a:pPr>
             <a:r>
@@ -3018,55 +2797,7 @@
       </p:sp>
       <p:pic>
         <p:nvPicPr>
-          <p:cNvPr id="6" name="Magazine" descr="Cover of the Uzbekistan deep-dive magazine designed by Rafi">    </p:cNvPr>
-          <p:cNvPicPr>
-            <a:picLocks noChangeAspect="1"/>
-          </p:cNvPicPr>
-          <p:nvPr/>
-        </p:nvPicPr>
-        <p:blipFill>
-          <a:blip r:embed="rId1"/>
-          <a:stretch>
-            <a:fillRect/>
-          </a:stretch>
-        </p:blipFill>
-        <p:spPr>
-          <a:xfrm>
-            <a:off x="812800" y="2286000"/>
-            <a:ext cx="2159000" cy="3048000"/>
-          </a:xfrm>
-          <a:prstGeom prst="rect">
-            <a:avLst/>
-          </a:prstGeom>
-        </p:spPr>
-      </p:pic>
-      <p:pic>
-        <p:nvPicPr>
-          <p:cNvPr id="7" name="Steamy" descr="Steamy, the Zijing mascot, on stage at its launch">    </p:cNvPr>
-          <p:cNvPicPr>
-            <a:picLocks noChangeAspect="1"/>
-          </p:cNvPicPr>
-          <p:nvPr/>
-        </p:nvPicPr>
-        <p:blipFill>
-          <a:blip r:embed="rId2"/>
-          <a:stretch>
-            <a:fillRect/>
-          </a:stretch>
-        </p:blipFill>
-        <p:spPr>
-          <a:xfrm>
-            <a:off x="3124200" y="2286000"/>
-            <a:ext cx="4191000" cy="3048000"/>
-          </a:xfrm>
-          <a:prstGeom prst="rect">
-            <a:avLst/>
-          </a:prstGeom>
-        </p:spPr>
-      </p:pic>
-      <p:pic>
-        <p:nvPicPr>
-          <p:cNvPr id="8" name="Samarkand" descr="Meeting at Silk Road University in Samarkand during the Uzbekistan practice">    </p:cNvPr>
+          <p:cNvPr id="6" name="Magazine" descr="Cover of the Uzbekistan deep-dive magazine designed by Rafi"/>
           <p:cNvPicPr>
             <a:picLocks noChangeAspect="1"/>
           </p:cNvPicPr>
@@ -3080,6 +2811,54 @@
         </p:blipFill>
         <p:spPr>
           <a:xfrm>
+            <a:off x="812800" y="2286000"/>
+            <a:ext cx="2159000" cy="3048000"/>
+          </a:xfrm>
+          <a:prstGeom prst="rect">
+            <a:avLst/>
+          </a:prstGeom>
+        </p:spPr>
+      </p:pic>
+      <p:pic>
+        <p:nvPicPr>
+          <p:cNvPr id="7" name="Steamy" descr="Steamy, the Zijing mascot, on stage at its launch"/>
+          <p:cNvPicPr>
+            <a:picLocks noChangeAspect="1"/>
+          </p:cNvPicPr>
+          <p:nvPr/>
+        </p:nvPicPr>
+        <p:blipFill>
+          <a:blip r:embed="rId4"/>
+          <a:stretch>
+            <a:fillRect/>
+          </a:stretch>
+        </p:blipFill>
+        <p:spPr>
+          <a:xfrm>
+            <a:off x="3124200" y="2286000"/>
+            <a:ext cx="4191000" cy="3048000"/>
+          </a:xfrm>
+          <a:prstGeom prst="rect">
+            <a:avLst/>
+          </a:prstGeom>
+        </p:spPr>
+      </p:pic>
+      <p:pic>
+        <p:nvPicPr>
+          <p:cNvPr id="8" name="Samarkand" descr="Meeting at Silk Road University in Samarkand during the Uzbekistan practice"/>
+          <p:cNvPicPr>
+            <a:picLocks noChangeAspect="1"/>
+          </p:cNvPicPr>
+          <p:nvPr/>
+        </p:nvPicPr>
+        <p:blipFill>
+          <a:blip r:embed="rId5"/>
+          <a:stretch>
+            <a:fillRect/>
+          </a:stretch>
+        </p:blipFill>
+        <p:spPr>
+          <a:xfrm>
             <a:off x="7467600" y="2286000"/>
             <a:ext cx="3911600" cy="3048000"/>
           </a:xfrm>
@@ -3109,7 +2888,7 @@
           <a:bodyPr wrap="square" lIns="0" tIns="0" rIns="0" bIns="0" rtlCol="0" anchor="t"/>
           <a:lstStyle/>
           <a:p>
-            <a:pPr indent="0" marL="0">
+            <a:pPr marL="0" indent="0">
               <a:buNone/>
             </a:pPr>
             <a:r>
@@ -3145,7 +2924,7 @@
           <a:bodyPr wrap="square" lIns="0" tIns="0" rIns="0" bIns="0" rtlCol="0" anchor="t"/>
           <a:lstStyle/>
           <a:p>
-            <a:pPr indent="0" marL="0">
+            <a:pPr marL="0" indent="0">
               <a:buNone/>
             </a:pPr>
             <a:r>
@@ -3181,7 +2960,7 @@
           <a:bodyPr wrap="square" lIns="0" tIns="0" rIns="0" bIns="0" rtlCol="0" anchor="t"/>
           <a:lstStyle/>
           <a:p>
-            <a:pPr indent="0" marL="0">
+            <a:pPr marL="0" indent="0">
               <a:buNone/>
             </a:pPr>
             <a:r>
@@ -3212,6 +2991,7 @@
         <a:solidFill>
           <a:srgbClr val="1A1410"/>
         </a:solidFill>
+        <a:effectLst/>
       </p:bgPr>
     </p:bg>
     <p:spTree>
@@ -3230,55 +3010,7 @@
       </p:grpSpPr>
       <p:pic>
         <p:nvPicPr>
-          <p:cNvPr id="2" name="One photo" descr="Rafi singing Zijing's theme song One on stage at the Student Festival">    </p:cNvPr>
-          <p:cNvPicPr>
-            <a:picLocks noChangeAspect="1"/>
-          </p:cNvPicPr>
-          <p:nvPr/>
-        </p:nvPicPr>
-        <p:blipFill>
-          <a:blip r:embed="rId1"/>
-          <a:stretch>
-            <a:fillRect/>
-          </a:stretch>
-        </p:blipFill>
-        <p:spPr>
-          <a:xfrm>
-            <a:off x="0" y="0"/>
-            <a:ext cx="7874000" cy="6858000"/>
-          </a:xfrm>
-          <a:prstGeom prst="rect">
-            <a:avLst/>
-          </a:prstGeom>
-        </p:spPr>
-      </p:pic>
-      <p:pic>
-        <p:nvPicPr>
-          <p:cNvPr id="3" name="Scrim" descr="Decorative shading over photo">    </p:cNvPr>
-          <p:cNvPicPr>
-            <a:picLocks noChangeAspect="1"/>
-          </p:cNvPicPr>
-          <p:nvPr/>
-        </p:nvPicPr>
-        <p:blipFill>
-          <a:blip r:embed="rId2"/>
-          <a:stretch>
-            <a:fillRect/>
-          </a:stretch>
-        </p:blipFill>
-        <p:spPr>
-          <a:xfrm>
-            <a:off x="0" y="0"/>
-            <a:ext cx="7874000" cy="6858000"/>
-          </a:xfrm>
-          <a:prstGeom prst="rect">
-            <a:avLst/>
-          </a:prstGeom>
-        </p:spPr>
-      </p:pic>
-      <p:pic>
-        <p:nvPicPr>
-          <p:cNvPr id="4" name="C:RUSH photo" descr="C:RUSH K-pop dance set at the Student Festival">    </p:cNvPr>
+          <p:cNvPr id="2" name="One photo" descr="Rafi singing Zijing's theme song One on stage at the Student Festival"/>
           <p:cNvPicPr>
             <a:picLocks noChangeAspect="1"/>
           </p:cNvPicPr>
@@ -3292,8 +3024,8 @@
         </p:blipFill>
         <p:spPr>
           <a:xfrm>
-            <a:off x="7950200" y="0"/>
-            <a:ext cx="4241800" cy="2235200"/>
+            <a:off x="0" y="0"/>
+            <a:ext cx="7874000" cy="6858000"/>
           </a:xfrm>
           <a:prstGeom prst="rect">
             <a:avLst/>
@@ -3302,7 +3034,7 @@
       </p:pic>
       <p:pic>
         <p:nvPicPr>
-          <p:cNvPr id="5" name="Chinese dance photo" descr="Chinese-song dance at the Student Festival">    </p:cNvPr>
+          <p:cNvPr id="3" name="Scrim" descr="Decorative shading over photo"/>
           <p:cNvPicPr>
             <a:picLocks noChangeAspect="1"/>
           </p:cNvPicPr>
@@ -3316,8 +3048,8 @@
         </p:blipFill>
         <p:spPr>
           <a:xfrm>
-            <a:off x="7950200" y="2311400"/>
-            <a:ext cx="4241800" cy="2235200"/>
+            <a:off x="0" y="0"/>
+            <a:ext cx="7874000" cy="6858000"/>
           </a:xfrm>
           <a:prstGeom prst="rect">
             <a:avLst/>
@@ -3326,7 +3058,7 @@
       </p:pic>
       <p:pic>
         <p:nvPicPr>
-          <p:cNvPr id="6" name="Ma Cup photo" descr="Ma Cup cheer team in the gym">    </p:cNvPr>
+          <p:cNvPr id="4" name="C:RUSH photo" descr="C:RUSH K-pop dance set at the Student Festival"/>
           <p:cNvPicPr>
             <a:picLocks noChangeAspect="1"/>
           </p:cNvPicPr>
@@ -3340,8 +3072,57 @@
         </p:blipFill>
         <p:spPr>
           <a:xfrm>
+            <a:off x="7950200" y="0"/>
+            <a:ext cx="4241800" cy="2235200"/>
+          </a:xfrm>
+          <a:prstGeom prst="rect">
+            <a:avLst/>
+          </a:prstGeom>
+        </p:spPr>
+      </p:pic>
+      <p:pic>
+        <p:nvPicPr>
+          <p:cNvPr id="5" name="Chinese dance photo" descr="Chinese-song dance at the Student Festival"/>
+          <p:cNvPicPr>
+            <a:picLocks noChangeAspect="1"/>
+          </p:cNvPicPr>
+          <p:nvPr/>
+        </p:nvPicPr>
+        <p:blipFill>
+          <a:blip r:embed="rId6"/>
+          <a:stretch>
+            <a:fillRect/>
+          </a:stretch>
+        </p:blipFill>
+        <p:spPr>
+          <a:xfrm>
+            <a:off x="7950200" y="2311400"/>
+            <a:ext cx="4241800" cy="2235200"/>
+          </a:xfrm>
+          <a:prstGeom prst="rect">
+            <a:avLst/>
+          </a:prstGeom>
+        </p:spPr>
+      </p:pic>
+      <p:pic>
+        <p:nvPicPr>
+          <p:cNvPr id="6" name="Ma Cup photo" descr="Ma Cup cheer team in the gym"/>
+          <p:cNvPicPr>
+            <a:picLocks noChangeAspect="1"/>
+          </p:cNvPicPr>
+          <p:nvPr/>
+        </p:nvPicPr>
+        <p:blipFill>
+          <a:blip r:embed="rId7"/>
+          <a:srcRect t="9" b="-9"/>
+          <a:stretch>
+            <a:fillRect/>
+          </a:stretch>
+        </p:blipFill>
+        <p:spPr>
+          <a:xfrm>
             <a:off x="7950200" y="4622800"/>
-            <a:ext cx="4241800" cy="2235200"/>
+            <a:ext cx="4241800" cy="2235600"/>
           </a:xfrm>
           <a:prstGeom prst="rect">
             <a:avLst/>
@@ -3375,7 +3156,7 @@
           <a:bodyPr wrap="square" lIns="114300" tIns="114300" rIns="114300" bIns="114300" rtlCol="0" anchor="ctr"/>
           <a:lstStyle/>
           <a:p>
-            <a:pPr algn="l" indent="0" marL="0">
+            <a:pPr marL="0" indent="0" algn="l">
               <a:buNone/>
             </a:pPr>
             <a:r>
@@ -3417,7 +3198,7 @@
           <a:bodyPr wrap="square" lIns="114300" tIns="114300" rIns="114300" bIns="114300" rtlCol="0" anchor="ctr"/>
           <a:lstStyle/>
           <a:p>
-            <a:pPr algn="l" indent="0" marL="0">
+            <a:pPr marL="0" indent="0" algn="l">
               <a:buNone/>
             </a:pPr>
             <a:r>
@@ -3459,7 +3240,7 @@
           <a:bodyPr wrap="square" lIns="114300" tIns="114300" rIns="114300" bIns="114300" rtlCol="0" anchor="ctr"/>
           <a:lstStyle/>
           <a:p>
-            <a:pPr algn="l" indent="0" marL="0">
+            <a:pPr marL="0" indent="0" algn="l">
               <a:buNone/>
             </a:pPr>
             <a:r>
@@ -3495,11 +3276,11 @@
           <a:bodyPr wrap="square" lIns="0" tIns="0" rIns="0" bIns="0" rtlCol="0" anchor="t"/>
           <a:lstStyle/>
           <a:p>
-            <a:pPr indent="0" marL="0">
+            <a:pPr marL="0" indent="0">
               <a:buNone/>
             </a:pPr>
             <a:r>
-              <a:rPr lang="en-US" sz="1200" b="1" spc="400" kern="0" dirty="0">
+              <a:rPr lang="en-US" sz="1200" b="1" kern="0" spc="400" dirty="0">
                 <a:solidFill>
                   <a:schemeClr val="accent1"/>
                 </a:solidFill>
@@ -3531,7 +3312,7 @@
           <a:bodyPr wrap="square" lIns="0" tIns="0" rIns="0" bIns="0" rtlCol="0" anchor="t"/>
           <a:lstStyle/>
           <a:p>
-            <a:pPr indent="0" marL="0">
+            <a:pPr marL="0" indent="0">
               <a:lnSpc>
                 <a:spcPct val="95000"/>
               </a:lnSpc>
@@ -3573,7 +3354,7 @@
           <a:bodyPr wrap="square" lIns="0" tIns="0" rIns="0" bIns="0" rtlCol="0" anchor="t"/>
           <a:lstStyle/>
           <a:p>
-            <a:pPr indent="0" marL="0">
+            <a:pPr marL="0" indent="0">
               <a:buNone/>
             </a:pPr>
             <a:r>
@@ -3604,6 +3385,7 @@
         <a:solidFill>
           <a:srgbClr val="1A1410"/>
         </a:solidFill>
+        <a:effectLst/>
       </p:bgPr>
     </p:bg>
     <p:spTree>
@@ -3622,55 +3404,7 @@
       </p:grpSpPr>
       <p:pic>
         <p:nvPicPr>
-          <p:cNvPr id="2" name="Close photo" descr="Mid-Autumn party at Zijing under a banner reading Warming hearts, Zijing family, Never apart">    </p:cNvPr>
-          <p:cNvPicPr>
-            <a:picLocks noChangeAspect="1"/>
-          </p:cNvPicPr>
-          <p:nvPr/>
-        </p:nvPicPr>
-        <p:blipFill>
-          <a:blip r:embed="rId1"/>
-          <a:stretch>
-            <a:fillRect/>
-          </a:stretch>
-        </p:blipFill>
-        <p:spPr>
-          <a:xfrm>
-            <a:off x="0" y="0"/>
-            <a:ext cx="12192000" cy="6858000"/>
-          </a:xfrm>
-          <a:prstGeom prst="rect">
-            <a:avLst/>
-          </a:prstGeom>
-        </p:spPr>
-      </p:pic>
-      <p:pic>
-        <p:nvPicPr>
-          <p:cNvPr id="3" name="Scrim" descr="Decorative shading over photo">    </p:cNvPr>
-          <p:cNvPicPr>
-            <a:picLocks noChangeAspect="1"/>
-          </p:cNvPicPr>
-          <p:nvPr/>
-        </p:nvPicPr>
-        <p:blipFill>
-          <a:blip r:embed="rId2"/>
-          <a:stretch>
-            <a:fillRect/>
-          </a:stretch>
-        </p:blipFill>
-        <p:spPr>
-          <a:xfrm>
-            <a:off x="0" y="0"/>
-            <a:ext cx="12192000" cy="6858000"/>
-          </a:xfrm>
-          <a:prstGeom prst="rect">
-            <a:avLst/>
-          </a:prstGeom>
-        </p:spPr>
-      </p:pic>
-      <p:pic>
-        <p:nvPicPr>
-          <p:cNvPr id="4" name="Kawung batik border" descr="Decorative kawung batik border">    </p:cNvPr>
+          <p:cNvPr id="2" name="Close photo" descr="Mid-Autumn party at Zijing under a banner reading Warming hearts, Zijing family, Never apart"/>
           <p:cNvPicPr>
             <a:picLocks noChangeAspect="1"/>
           </p:cNvPicPr>
@@ -3685,6 +3419,54 @@
         <p:spPr>
           <a:xfrm>
             <a:off x="0" y="0"/>
+            <a:ext cx="12192000" cy="6858000"/>
+          </a:xfrm>
+          <a:prstGeom prst="rect">
+            <a:avLst/>
+          </a:prstGeom>
+        </p:spPr>
+      </p:pic>
+      <p:pic>
+        <p:nvPicPr>
+          <p:cNvPr id="3" name="Scrim" descr="Decorative shading over photo"/>
+          <p:cNvPicPr>
+            <a:picLocks noChangeAspect="1"/>
+          </p:cNvPicPr>
+          <p:nvPr/>
+        </p:nvPicPr>
+        <p:blipFill>
+          <a:blip r:embed="rId4"/>
+          <a:stretch>
+            <a:fillRect/>
+          </a:stretch>
+        </p:blipFill>
+        <p:spPr>
+          <a:xfrm>
+            <a:off x="0" y="0"/>
+            <a:ext cx="12192000" cy="6858000"/>
+          </a:xfrm>
+          <a:prstGeom prst="rect">
+            <a:avLst/>
+          </a:prstGeom>
+        </p:spPr>
+      </p:pic>
+      <p:pic>
+        <p:nvPicPr>
+          <p:cNvPr id="4" name="Kawung batik border" descr="Decorative kawung batik border"/>
+          <p:cNvPicPr>
+            <a:picLocks noChangeAspect="1"/>
+          </p:cNvPicPr>
+          <p:nvPr/>
+        </p:nvPicPr>
+        <p:blipFill>
+          <a:blip r:embed="rId5"/>
+          <a:stretch>
+            <a:fillRect/>
+          </a:stretch>
+        </p:blipFill>
+        <p:spPr>
+          <a:xfrm>
+            <a:off x="0" y="0"/>
             <a:ext cx="609600" cy="6858000"/>
           </a:xfrm>
           <a:prstGeom prst="rect">
@@ -3713,11 +3495,11 @@
           <a:bodyPr wrap="square" lIns="0" tIns="0" rIns="0" bIns="0" rtlCol="0" anchor="t"/>
           <a:lstStyle/>
           <a:p>
-            <a:pPr indent="0" marL="0">
+            <a:pPr marL="0" indent="0">
               <a:buNone/>
             </a:pPr>
             <a:r>
-              <a:rPr lang="en-US" sz="1200" b="1" spc="400" kern="0" dirty="0">
+              <a:rPr lang="en-US" sz="1200" b="1" kern="0" spc="400" dirty="0">
                 <a:solidFill>
                   <a:schemeClr val="accent1"/>
                 </a:solidFill>
@@ -3749,7 +3531,7 @@
           <a:bodyPr wrap="square" lIns="0" tIns="0" rIns="0" bIns="0" rtlCol="0" anchor="t"/>
           <a:lstStyle/>
           <a:p>
-            <a:pPr indent="0" marL="0">
+            <a:pPr marL="0" indent="0">
               <a:lnSpc>
                 <a:spcPct val="95000"/>
               </a:lnSpc>
@@ -3867,7 +3649,7 @@
           <a:bodyPr wrap="square" lIns="0" tIns="0" rIns="0" bIns="0" rtlCol="0" anchor="t"/>
           <a:lstStyle/>
           <a:p>
-            <a:pPr indent="0" marL="0">
+            <a:pPr marL="0" indent="0">
               <a:buNone/>
             </a:pPr>
             <a:r>
@@ -4186,4 +3968,319 @@
     </a:ext>
   </a:extLst>
 </a:theme>
+</file>
+
+<file path=ppt/theme/theme2.xml><?xml version="1.0" encoding="utf-8"?>
+<a:theme xmlns:a="http://schemas.openxmlformats.org/drawingml/2006/main" name="Office Theme">
+  <a:themeElements>
+    <a:clrScheme name="Office">
+      <a:dk1>
+        <a:sysClr val="windowText" lastClr="000000"/>
+      </a:dk1>
+      <a:lt1>
+        <a:sysClr val="window" lastClr="FFFFFF"/>
+      </a:lt1>
+      <a:dk2>
+        <a:srgbClr val="0E2841"/>
+      </a:dk2>
+      <a:lt2>
+        <a:srgbClr val="E8E8E8"/>
+      </a:lt2>
+      <a:accent1>
+        <a:srgbClr val="156082"/>
+      </a:accent1>
+      <a:accent2>
+        <a:srgbClr val="E97132"/>
+      </a:accent2>
+      <a:accent3>
+        <a:srgbClr val="196B24"/>
+      </a:accent3>
+      <a:accent4>
+        <a:srgbClr val="0F9ED5"/>
+      </a:accent4>
+      <a:accent5>
+        <a:srgbClr val="A02B93"/>
+      </a:accent5>
+      <a:accent6>
+        <a:srgbClr val="4EA72E"/>
+      </a:accent6>
+      <a:hlink>
+        <a:srgbClr val="467886"/>
+      </a:hlink>
+      <a:folHlink>
+        <a:srgbClr val="96607D"/>
+      </a:folHlink>
+    </a:clrScheme>
+    <a:fontScheme name="Office">
+      <a:majorFont>
+        <a:latin typeface="Aptos Display" panose="02110004020202020204"/>
+        <a:ea typeface=""/>
+        <a:cs typeface=""/>
+        <a:font script="Jpan" typeface="游ゴシック Light"/>
+        <a:font script="Hang" typeface="맑은 고딕"/>
+        <a:font script="Hans" typeface="等线 Light"/>
+        <a:font script="Hant" typeface="新細明體"/>
+        <a:font script="Arab" typeface="Times New Roman"/>
+        <a:font script="Hebr" typeface="Times New Roman"/>
+        <a:font script="Thai" typeface="Angsana New"/>
+        <a:font script="Ethi" typeface="Nyala"/>
+        <a:font script="Beng" typeface="Vrinda"/>
+        <a:font script="Gujr" typeface="Shruti"/>
+        <a:font script="Khmr" typeface="MoolBoran"/>
+        <a:font script="Knda" typeface="Tunga"/>
+        <a:font script="Guru" typeface="Raavi"/>
+        <a:font script="Cans" typeface="Euphemia"/>
+        <a:font script="Cher" typeface="Plantagenet Cherokee"/>
+        <a:font script="Yiii" typeface="Microsoft Yi Baiti"/>
+        <a:font script="Tibt" typeface="Microsoft Himalaya"/>
+        <a:font script="Thaa" typeface="MV Boli"/>
+        <a:font script="Deva" typeface="Mangal"/>
+        <a:font script="Telu" typeface="Gautami"/>
+        <a:font script="Taml" typeface="Latha"/>
+        <a:font script="Syrc" typeface="Estrangelo Edessa"/>
+        <a:font script="Orya" typeface="Kalinga"/>
+        <a:font script="Mlym" typeface="Kartika"/>
+        <a:font script="Laoo" typeface="DokChampa"/>
+        <a:font script="Sinh" typeface="Iskoola Pota"/>
+        <a:font script="Mong" typeface="Mongolian Baiti"/>
+        <a:font script="Viet" typeface="Times New Roman"/>
+        <a:font script="Uigh" typeface="Microsoft Uighur"/>
+        <a:font script="Geor" typeface="Sylfaen"/>
+        <a:font script="Armn" typeface="Arial"/>
+        <a:font script="Bugi" typeface="Leelawadee UI"/>
+        <a:font script="Bopo" typeface="Microsoft JhengHei"/>
+        <a:font script="Java" typeface="Javanese Text"/>
+        <a:font script="Lisu" typeface="Segoe UI"/>
+        <a:font script="Mymr" typeface="Myanmar Text"/>
+        <a:font script="Nkoo" typeface="Ebrima"/>
+        <a:font script="Olck" typeface="Nirmala UI"/>
+        <a:font script="Osma" typeface="Ebrima"/>
+        <a:font script="Phag" typeface="Phagspa"/>
+        <a:font script="Syrn" typeface="Estrangelo Edessa"/>
+        <a:font script="Syrj" typeface="Estrangelo Edessa"/>
+        <a:font script="Syre" typeface="Estrangelo Edessa"/>
+        <a:font script="Sora" typeface="Nirmala UI"/>
+        <a:font script="Tale" typeface="Microsoft Tai Le"/>
+        <a:font script="Talu" typeface="Microsoft New Tai Lue"/>
+        <a:font script="Tfng" typeface="Ebrima"/>
+      </a:majorFont>
+      <a:minorFont>
+        <a:latin typeface="Aptos" panose="02110004020202020204"/>
+        <a:ea typeface=""/>
+        <a:cs typeface=""/>
+        <a:font script="Jpan" typeface="游ゴシック"/>
+        <a:font script="Hang" typeface="맑은 고딕"/>
+        <a:font script="Hans" typeface="等线"/>
+        <a:font script="Hant" typeface="新細明體"/>
+        <a:font script="Arab" typeface="Arial"/>
+        <a:font script="Hebr" typeface="Arial"/>
+        <a:font script="Thai" typeface="Cordia New"/>
+        <a:font script="Ethi" typeface="Nyala"/>
+        <a:font script="Beng" typeface="Vrinda"/>
+        <a:font script="Gujr" typeface="Shruti"/>
+        <a:font script="Khmr" typeface="DaunPenh"/>
+        <a:font script="Knda" typeface="Tunga"/>
+        <a:font script="Guru" typeface="Raavi"/>
+        <a:font script="Cans" typeface="Euphemia"/>
+        <a:font script="Cher" typeface="Plantagenet Cherokee"/>
+        <a:font script="Yiii" typeface="Microsoft Yi Baiti"/>
+        <a:font script="Tibt" typeface="Microsoft Himalaya"/>
+        <a:font script="Thaa" typeface="MV Boli"/>
+        <a:font script="Deva" typeface="Mangal"/>
+        <a:font script="Telu" typeface="Gautami"/>
+        <a:font script="Taml" typeface="Latha"/>
+        <a:font script="Syrc" typeface="Estrangelo Edessa"/>
+        <a:font script="Orya" typeface="Kalinga"/>
+        <a:font script="Mlym" typeface="Kartika"/>
+        <a:font script="Laoo" typeface="DokChampa"/>
+        <a:font script="Sinh" typeface="Iskoola Pota"/>
+        <a:font script="Mong" typeface="Mongolian Baiti"/>
+        <a:font script="Viet" typeface="Arial"/>
+        <a:font script="Uigh" typeface="Microsoft Uighur"/>
+        <a:font script="Geor" typeface="Sylfaen"/>
+        <a:font script="Armn" typeface="Arial"/>
+        <a:font script="Bugi" typeface="Leelawadee UI"/>
+        <a:font script="Bopo" typeface="Microsoft JhengHei"/>
+        <a:font script="Java" typeface="Javanese Text"/>
+        <a:font script="Lisu" typeface="Segoe UI"/>
+        <a:font script="Mymr" typeface="Myanmar Text"/>
+        <a:font script="Nkoo" typeface="Ebrima"/>
+        <a:font script="Olck" typeface="Nirmala UI"/>
+        <a:font script="Osma" typeface="Ebrima"/>
+        <a:font script="Phag" typeface="Phagspa"/>
+        <a:font script="Syrn" typeface="Estrangelo Edessa"/>
+        <a:font script="Syrj" typeface="Estrangelo Edessa"/>
+        <a:font script="Syre" typeface="Estrangelo Edessa"/>
+        <a:font script="Sora" typeface="Nirmala UI"/>
+        <a:font script="Tale" typeface="Microsoft Tai Le"/>
+        <a:font script="Talu" typeface="Microsoft New Tai Lue"/>
+        <a:font script="Tfng" typeface="Ebrima"/>
+      </a:minorFont>
+    </a:fontScheme>
+    <a:fmtScheme name="Office">
+      <a:fillStyleLst>
+        <a:solidFill>
+          <a:schemeClr val="phClr"/>
+        </a:solidFill>
+        <a:gradFill rotWithShape="1">
+          <a:gsLst>
+            <a:gs pos="0">
+              <a:schemeClr val="phClr">
+                <a:lumMod val="110000"/>
+                <a:satMod val="105000"/>
+                <a:tint val="67000"/>
+              </a:schemeClr>
+            </a:gs>
+            <a:gs pos="50000">
+              <a:schemeClr val="phClr">
+                <a:lumMod val="105000"/>
+                <a:satMod val="103000"/>
+                <a:tint val="73000"/>
+              </a:schemeClr>
+            </a:gs>
+            <a:gs pos="100000">
+              <a:schemeClr val="phClr">
+                <a:lumMod val="105000"/>
+                <a:satMod val="109000"/>
+                <a:tint val="81000"/>
+              </a:schemeClr>
+            </a:gs>
+          </a:gsLst>
+          <a:lin ang="5400000" scaled="0"/>
+        </a:gradFill>
+        <a:gradFill rotWithShape="1">
+          <a:gsLst>
+            <a:gs pos="0">
+              <a:schemeClr val="phClr">
+                <a:satMod val="103000"/>
+                <a:lumMod val="102000"/>
+                <a:tint val="94000"/>
+              </a:schemeClr>
+            </a:gs>
+            <a:gs pos="50000">
+              <a:schemeClr val="phClr">
+                <a:satMod val="110000"/>
+                <a:lumMod val="100000"/>
+                <a:shade val="100000"/>
+              </a:schemeClr>
+            </a:gs>
+            <a:gs pos="100000">
+              <a:schemeClr val="phClr">
+                <a:lumMod val="99000"/>
+                <a:satMod val="120000"/>
+                <a:shade val="78000"/>
+              </a:schemeClr>
+            </a:gs>
+          </a:gsLst>
+          <a:lin ang="5400000" scaled="0"/>
+        </a:gradFill>
+      </a:fillStyleLst>
+      <a:lnStyleLst>
+        <a:ln w="12700" cap="flat" cmpd="sng" algn="ctr">
+          <a:solidFill>
+            <a:schemeClr val="phClr"/>
+          </a:solidFill>
+          <a:prstDash val="solid"/>
+          <a:miter lim="800000"/>
+        </a:ln>
+        <a:ln w="19050" cap="flat" cmpd="sng" algn="ctr">
+          <a:solidFill>
+            <a:schemeClr val="phClr"/>
+          </a:solidFill>
+          <a:prstDash val="solid"/>
+          <a:miter lim="800000"/>
+        </a:ln>
+        <a:ln w="25400" cap="flat" cmpd="sng" algn="ctr">
+          <a:solidFill>
+            <a:schemeClr val="phClr"/>
+          </a:solidFill>
+          <a:prstDash val="solid"/>
+          <a:miter lim="800000"/>
+        </a:ln>
+      </a:lnStyleLst>
+      <a:effectStyleLst>
+        <a:effectStyle>
+          <a:effectLst/>
+        </a:effectStyle>
+        <a:effectStyle>
+          <a:effectLst/>
+        </a:effectStyle>
+        <a:effectStyle>
+          <a:effectLst>
+            <a:outerShdw blurRad="57150" dist="19050" dir="5400000" algn="ctr" rotWithShape="0">
+              <a:srgbClr val="000000">
+                <a:alpha val="63000"/>
+              </a:srgbClr>
+            </a:outerShdw>
+          </a:effectLst>
+        </a:effectStyle>
+      </a:effectStyleLst>
+      <a:bgFillStyleLst>
+        <a:solidFill>
+          <a:schemeClr val="phClr"/>
+        </a:solidFill>
+        <a:solidFill>
+          <a:schemeClr val="phClr">
+            <a:tint val="95000"/>
+            <a:satMod val="170000"/>
+          </a:schemeClr>
+        </a:solidFill>
+        <a:gradFill rotWithShape="1">
+          <a:gsLst>
+            <a:gs pos="0">
+              <a:schemeClr val="phClr">
+                <a:tint val="93000"/>
+                <a:satMod val="150000"/>
+                <a:shade val="98000"/>
+                <a:lumMod val="102000"/>
+              </a:schemeClr>
+            </a:gs>
+            <a:gs pos="50000">
+              <a:schemeClr val="phClr">
+                <a:tint val="98000"/>
+                <a:satMod val="130000"/>
+                <a:shade val="90000"/>
+                <a:lumMod val="103000"/>
+              </a:schemeClr>
+            </a:gs>
+            <a:gs pos="100000">
+              <a:schemeClr val="phClr">
+                <a:shade val="63000"/>
+                <a:satMod val="120000"/>
+              </a:schemeClr>
+            </a:gs>
+          </a:gsLst>
+          <a:lin ang="5400000" scaled="0"/>
+        </a:gradFill>
+      </a:bgFillStyleLst>
+    </a:fmtScheme>
+  </a:themeElements>
+  <a:objectDefaults>
+    <a:lnDef>
+      <a:spPr/>
+      <a:bodyPr/>
+      <a:lstStyle/>
+      <a:style>
+        <a:lnRef idx="2">
+          <a:schemeClr val="accent1"/>
+        </a:lnRef>
+        <a:fillRef idx="0">
+          <a:schemeClr val="accent1"/>
+        </a:fillRef>
+        <a:effectRef idx="1">
+          <a:schemeClr val="accent1"/>
+        </a:effectRef>
+        <a:fontRef idx="minor">
+          <a:schemeClr val="tx1"/>
+        </a:fontRef>
+      </a:style>
+    </a:lnDef>
+  </a:objectDefaults>
+  <a:extraClrSchemeLst/>
+  <a:extLst>
+    <a:ext uri="{05A4C25C-085E-4340-85A3-A5531E510DB2}">
+      <thm15:themeFamily xmlns:thm15="http://schemas.microsoft.com/office/thememl/2012/main" name="Office Theme" id="{2E142A2C-CD16-42D6-873A-C26D2A0506FA}" vid="{1BDDFF52-6CD6-40A5-AB3C-68EB2F1E4D0A}"/>
+    </a:ext>
+  </a:extLst>
+</a:theme>
 </file>